--- a/slide deck RecSys.pptx
+++ b/slide deck RecSys.pptx
@@ -14284,8 +14284,8 @@
         </p:nvSpPr>
         <p:spPr>
           <a:xfrm>
-            <a:off x="1333500" y="8679180"/>
-            <a:ext cx="5650992" cy="403860"/>
+            <a:off x="7734299" y="8743949"/>
+            <a:ext cx="8845217" cy="1446797"/>
           </a:xfrm>
           <a:prstGeom prst="rect">
             <a:avLst/>
@@ -14295,15 +14295,14 @@
         </p:spPr>
         <p:txBody>
           <a:bodyPr wrap="square" lIns="25400" tIns="25400" rIns="25400" bIns="25400" rtlCol="0" anchor="t">
-            <a:normAutofit fontScale="92500" lnSpcReduction="20000"/>
-          </a:bodyPr>
-          <a:lstStyle/>
-          <a:p>
-            <a:pPr marL="0" indent="0" algn="l">
+            <a:normAutofit fontScale="85000" lnSpcReduction="10000"/>
+          </a:bodyPr>
+          <a:lstStyle/>
+          <a:p>
+            <a:pPr>
               <a:lnSpc>
                 <a:spcPct val="160000"/>
               </a:lnSpc>
-              <a:buNone/>
             </a:pPr>
             <a:r>
               <a:rPr lang="en-US" sz="1800" dirty="0">
@@ -14314,9 +14313,47 @@
                 <a:ea typeface="Courier New" pitchFamily="34" charset="-122"/>
                 <a:cs typeface="Courier New" pitchFamily="34" charset="-120"/>
               </a:rPr>
+              <a:t>It is slower because it is deployed on render and it might fail sometimes because of memory constraint, so it’s better to run it locally.</a:t>
+            </a:r>
+          </a:p>
+          <a:p>
+            <a:pPr>
+              <a:lnSpc>
+                <a:spcPct val="160000"/>
+              </a:lnSpc>
+            </a:pPr>
+            <a:r>
+              <a:rPr lang="en-US" sz="1800" dirty="0">
+                <a:solidFill>
+                  <a:srgbClr val="3A372F"/>
+                </a:solidFill>
+                <a:latin typeface="Courier New" pitchFamily="34" charset="0"/>
+                <a:ea typeface="Courier New" pitchFamily="34" charset="-122"/>
+                <a:cs typeface="Courier New" pitchFamily="34" charset="-120"/>
+              </a:rPr>
               <a:t>Live demo:</a:t>
             </a:r>
-            <a:endParaRPr lang="en-US" sz="1800" dirty="0"/>
+            <a:r>
+              <a:rPr lang="en-US" dirty="0">
+                <a:solidFill>
+                  <a:srgbClr val="3A372F"/>
+                </a:solidFill>
+                <a:latin typeface="Courier New" pitchFamily="34" charset="0"/>
+                <a:ea typeface="Courier New" pitchFamily="34" charset="-122"/>
+                <a:cs typeface="Courier New" pitchFamily="34" charset="-120"/>
+              </a:rPr>
+              <a:t> </a:t>
+            </a:r>
+            <a:r>
+              <a:rPr lang="en-US" sz="2400" dirty="0">
+                <a:solidFill>
+                  <a:srgbClr val="2F6F75"/>
+                </a:solidFill>
+                <a:latin typeface="Courier New" pitchFamily="34" charset="0"/>
+                <a:cs typeface="Courier New" pitchFamily="34" charset="-120"/>
+              </a:rPr>
+              <a:t>https://cinema-recommender-s23s.onrender.com</a:t>
+            </a:r>
           </a:p>
         </p:txBody>
       </p:sp>
@@ -14328,7 +14365,7 @@
         </p:nvSpPr>
         <p:spPr>
           <a:xfrm>
-            <a:off x="1333500" y="9044940"/>
+            <a:off x="1514837" y="9041131"/>
             <a:ext cx="5650992" cy="403860"/>
           </a:xfrm>
           <a:prstGeom prst="rect">

--- a/slide deck RecSys.pptx
+++ b/slide deck RecSys.pptx
@@ -13730,7 +13730,7 @@
         </p:spPr>
         <p:txBody>
           <a:bodyPr wrap="square" lIns="25400" tIns="25400" rIns="25400" bIns="25400" rtlCol="0" anchor="t">
-            <a:normAutofit fontScale="85000" lnSpcReduction="20000"/>
+            <a:normAutofit fontScale="85000" lnSpcReduction="10000"/>
           </a:bodyPr>
           <a:lstStyle/>
           <a:p>
@@ -13771,7 +13771,7 @@
             </a:pPr>
             <a:r>
               <a:rPr lang="en-GB" sz="2100" dirty="0"/>
-              <a:t>"Trending now"  section which is just the 24 most-rated movies in the dataset, the same for every user and every model, ignoring what they've already watched. It's not time-based and not personalized. It's visual filler to make better ux.</a:t>
+              <a:t>"Trending now"  section which is just the most-rated movies in the dataset, the same for every user and every model, ignoring what they've already watched. It's not time-based and not personalized. It's visual filler to make better ux.</a:t>
             </a:r>
             <a:endParaRPr lang="en-US" sz="2100" dirty="0"/>
           </a:p>
@@ -13901,8 +13901,8 @@
         </p:nvSpPr>
         <p:spPr>
           <a:xfrm>
-            <a:off x="9656445" y="3964305"/>
-            <a:ext cx="7116718" cy="795338"/>
+            <a:off x="9656445" y="3964304"/>
+            <a:ext cx="7116718" cy="1393507"/>
           </a:xfrm>
           <a:prstGeom prst="rect">
             <a:avLst/>
@@ -13912,15 +13912,14 @@
         </p:spPr>
         <p:txBody>
           <a:bodyPr wrap="square" lIns="25400" tIns="25400" rIns="25400" bIns="25400" rtlCol="0" anchor="t">
-            <a:normAutofit fontScale="92500" lnSpcReduction="10000"/>
-          </a:bodyPr>
-          <a:lstStyle/>
-          <a:p>
-            <a:pPr marL="0" indent="0" algn="l">
+            <a:normAutofit fontScale="85000" lnSpcReduction="20000"/>
+          </a:bodyPr>
+          <a:lstStyle/>
+          <a:p>
+            <a:pPr>
               <a:lnSpc>
                 <a:spcPct val="142000"/>
               </a:lnSpc>
-              <a:buNone/>
             </a:pPr>
             <a:r>
               <a:rPr lang="en-US" sz="2100" dirty="0">
@@ -13931,7 +13930,29 @@
                 <a:ea typeface="Arial" pitchFamily="34" charset="-122"/>
                 <a:cs typeface="Arial" pitchFamily="34" charset="-120"/>
               </a:rPr>
-              <a:t>Existing user (pick from 610) or cold start. Rate a few films, get instant recs.</a:t>
+              <a:t>Existing user (pick from 610) or cold start. Rate a few films, get instant recs. It is available for content based only because </a:t>
+            </a:r>
+            <a:r>
+              <a:rPr lang="en-GB" sz="2100" dirty="0">
+                <a:solidFill>
+                  <a:srgbClr val="3A372F"/>
+                </a:solidFill>
+                <a:latin typeface="Arial" pitchFamily="34" charset="0"/>
+                <a:ea typeface="Arial" pitchFamily="34" charset="-122"/>
+                <a:cs typeface="Arial" pitchFamily="34" charset="-120"/>
+              </a:rPr>
+              <a:t>it's the one method that can say something sensible about a person it has never seen before and also for </a:t>
+            </a:r>
+            <a:r>
+              <a:rPr lang="en-US" sz="2100" dirty="0">
+                <a:solidFill>
+                  <a:srgbClr val="3A372F"/>
+                </a:solidFill>
+                <a:latin typeface="Arial" pitchFamily="34" charset="0"/>
+                <a:ea typeface="Arial" pitchFamily="34" charset="-122"/>
+                <a:cs typeface="Arial" pitchFamily="34" charset="-120"/>
+              </a:rPr>
+              <a:t>memory cost on Render.</a:t>
             </a:r>
             <a:endParaRPr lang="en-US" sz="2100" dirty="0"/>
           </a:p>
@@ -14284,8 +14305,8 @@
         </p:nvSpPr>
         <p:spPr>
           <a:xfrm>
-            <a:off x="7734299" y="8743949"/>
-            <a:ext cx="8845217" cy="1446797"/>
+            <a:off x="1309438" y="8525178"/>
+            <a:ext cx="8845217" cy="556461"/>
           </a:xfrm>
           <a:prstGeom prst="rect">
             <a:avLst/>
@@ -14313,17 +14334,10 @@
                 <a:ea typeface="Courier New" pitchFamily="34" charset="-122"/>
                 <a:cs typeface="Courier New" pitchFamily="34" charset="-120"/>
               </a:rPr>
-              <a:t>It is slower because it is deployed on render and it might fail sometimes because of memory constraint, so it’s better to run it locally.</a:t>
-            </a:r>
-          </a:p>
-          <a:p>
-            <a:pPr>
-              <a:lnSpc>
-                <a:spcPct val="160000"/>
-              </a:lnSpc>
-            </a:pPr>
-            <a:r>
-              <a:rPr lang="en-US" sz="1800" dirty="0">
+              <a:t>Live demo:</a:t>
+            </a:r>
+            <a:r>
+              <a:rPr lang="en-US" dirty="0">
                 <a:solidFill>
                   <a:srgbClr val="3A372F"/>
                 </a:solidFill>
@@ -14331,17 +14345,6 @@
                 <a:ea typeface="Courier New" pitchFamily="34" charset="-122"/>
                 <a:cs typeface="Courier New" pitchFamily="34" charset="-120"/>
               </a:rPr>
-              <a:t>Live demo:</a:t>
-            </a:r>
-            <a:r>
-              <a:rPr lang="en-US" dirty="0">
-                <a:solidFill>
-                  <a:srgbClr val="3A372F"/>
-                </a:solidFill>
-                <a:latin typeface="Courier New" pitchFamily="34" charset="0"/>
-                <a:ea typeface="Courier New" pitchFamily="34" charset="-122"/>
-                <a:cs typeface="Courier New" pitchFamily="34" charset="-120"/>
-              </a:rPr>
               <a:t> </a:t>
             </a:r>
             <a:r>
@@ -14365,7 +14368,7 @@
         </p:nvSpPr>
         <p:spPr>
           <a:xfrm>
-            <a:off x="1514837" y="9041131"/>
+            <a:off x="1309438" y="9081639"/>
             <a:ext cx="5650992" cy="403860"/>
           </a:xfrm>
           <a:prstGeom prst="rect">
